--- a/docs/reports/project-status-2026-07-11.pptx
+++ b/docs/reports/project-status-2026-07-11.pptx
@@ -1702,6 +1702,10 @@
             <a:prstDash val="solid"/>
           </a:ln>
         </p:spPr>
+        <p:txBody>
+          <a:bodyPr/>
+          <a:p/>
+        </p:txBody>
       </p:sp>
       <p:sp>
         <p:nvSpPr>
@@ -1731,6 +1735,10 @@
             <a:prstDash val="solid"/>
           </a:ln>
         </p:spPr>
+        <p:txBody>
+          <a:bodyPr/>
+          <a:p/>
+        </p:txBody>
       </p:sp>
       <p:sp>
         <p:nvSpPr>
@@ -1740,7 +1748,7 @@
         </p:nvSpPr>
         <p:spPr>
           <a:xfrm>
-            <a:off x="7315200" y="-822960"/>
+            <a:off x="6522720" y="0"/>
             <a:ext cx="5669280" cy="5669280"/>
           </a:xfrm>
           <a:prstGeom prst="arc">
@@ -1760,6 +1768,10 @@
             <a:prstDash val="solid"/>
           </a:ln>
         </p:spPr>
+        <p:txBody>
+          <a:bodyPr/>
+          <a:p/>
+        </p:txBody>
       </p:sp>
       <p:sp>
         <p:nvSpPr>
@@ -1789,6 +1801,10 @@
             <a:prstDash val="solid"/>
           </a:ln>
         </p:spPr>
+        <p:txBody>
+          <a:bodyPr/>
+          <a:p/>
+        </p:txBody>
       </p:sp>
       <p:sp>
         <p:nvSpPr>
@@ -1816,6 +1832,10 @@
             <a:prstDash val="solid"/>
           </a:ln>
         </p:spPr>
+        <p:txBody>
+          <a:bodyPr/>
+          <a:p/>
+        </p:txBody>
       </p:sp>
       <p:sp>
         <p:nvSpPr>
@@ -1962,6 +1982,10 @@
             <a:prstDash val="solid"/>
           </a:ln>
         </p:spPr>
+        <p:txBody>
+          <a:bodyPr/>
+          <a:p/>
+        </p:txBody>
       </p:sp>
       <p:sp>
         <p:nvSpPr>
@@ -2034,6 +2058,10 @@
             <a:prstDash val="solid"/>
           </a:ln>
         </p:spPr>
+        <p:txBody>
+          <a:bodyPr/>
+          <a:p/>
+        </p:txBody>
       </p:sp>
       <p:sp>
         <p:nvSpPr>
@@ -2145,6 +2173,10 @@
             <a:prstDash val="solid"/>
           </a:ln>
         </p:spPr>
+        <p:txBody>
+          <a:bodyPr/>
+          <a:p/>
+        </p:txBody>
       </p:sp>
       <p:sp>
         <p:nvSpPr>
@@ -2256,6 +2288,10 @@
             <a:prstDash val="solid"/>
           </a:ln>
         </p:spPr>
+        <p:txBody>
+          <a:bodyPr/>
+          <a:p/>
+        </p:txBody>
       </p:sp>
       <p:sp>
         <p:nvSpPr>
@@ -2367,6 +2403,10 @@
             <a:prstDash val="solid"/>
           </a:ln>
         </p:spPr>
+        <p:txBody>
+          <a:bodyPr/>
+          <a:p/>
+        </p:txBody>
       </p:sp>
       <p:sp>
         <p:nvSpPr>
@@ -2545,6 +2585,10 @@
             <a:prstDash val="solid"/>
           </a:ln>
         </p:spPr>
+        <p:txBody>
+          <a:bodyPr/>
+          <a:p/>
+        </p:txBody>
       </p:sp>
       <p:sp>
         <p:nvSpPr>
@@ -2572,6 +2616,10 @@
             <a:prstDash val="solid"/>
           </a:ln>
         </p:spPr>
+        <p:txBody>
+          <a:bodyPr/>
+          <a:p/>
+        </p:txBody>
       </p:sp>
       <p:sp>
         <p:nvSpPr>
@@ -2581,7 +2629,7 @@
         </p:nvSpPr>
         <p:spPr>
           <a:xfrm>
-            <a:off x="10012680" y="-228600"/>
+            <a:off x="9083040" y="0"/>
             <a:ext cx="3108960" cy="3108960"/>
           </a:xfrm>
           <a:prstGeom prst="arc">
@@ -2601,6 +2649,10 @@
             <a:prstDash val="solid"/>
           </a:ln>
         </p:spPr>
+        <p:txBody>
+          <a:bodyPr/>
+          <a:p/>
+        </p:txBody>
       </p:sp>
       <p:sp>
         <p:nvSpPr>
@@ -2628,6 +2680,10 @@
             <a:prstDash val="solid"/>
           </a:ln>
         </p:spPr>
+        <p:txBody>
+          <a:bodyPr/>
+          <a:p/>
+        </p:txBody>
       </p:sp>
       <p:sp>
         <p:nvSpPr>
@@ -2731,6 +2787,10 @@
             <a:prstDash val="solid"/>
           </a:ln>
         </p:spPr>
+        <p:txBody>
+          <a:bodyPr/>
+          <a:p/>
+        </p:txBody>
       </p:sp>
       <p:sp>
         <p:nvSpPr>
@@ -2884,6 +2944,10 @@
             </a:outerShdw>
           </a:effectLst>
         </p:spPr>
+        <p:txBody>
+          <a:bodyPr/>
+          <a:p/>
+        </p:txBody>
       </p:sp>
       <p:sp>
         <p:nvSpPr>
@@ -2909,6 +2973,10 @@
             <a:prstDash val="solid"/>
           </a:ln>
         </p:spPr>
+        <p:txBody>
+          <a:bodyPr/>
+          <a:p/>
+        </p:txBody>
       </p:sp>
       <p:sp>
         <p:nvSpPr>
@@ -3014,6 +3082,10 @@
             <a:prstDash val="solid"/>
           </a:ln>
         </p:spPr>
+        <p:txBody>
+          <a:bodyPr/>
+          <a:p/>
+        </p:txBody>
       </p:sp>
       <p:sp>
         <p:nvSpPr>
@@ -3119,6 +3191,10 @@
             <a:prstDash val="solid"/>
           </a:ln>
         </p:spPr>
+        <p:txBody>
+          <a:bodyPr/>
+          <a:p/>
+        </p:txBody>
       </p:sp>
       <p:sp>
         <p:nvSpPr>
@@ -3226,6 +3302,10 @@
             <a:prstDash val="solid"/>
           </a:ln>
         </p:spPr>
+        <p:txBody>
+          <a:bodyPr/>
+          <a:p/>
+        </p:txBody>
       </p:sp>
       <p:sp>
         <p:nvSpPr>
@@ -3326,6 +3406,10 @@
             <a:prstDash val="solid"/>
           </a:ln>
         </p:spPr>
+        <p:txBody>
+          <a:bodyPr/>
+          <a:p/>
+        </p:txBody>
       </p:sp>
       <p:sp>
         <p:nvSpPr>
@@ -3353,6 +3437,10 @@
             <a:prstDash val="solid"/>
           </a:ln>
         </p:spPr>
+        <p:txBody>
+          <a:bodyPr/>
+          <a:p/>
+        </p:txBody>
       </p:sp>
       <p:sp>
         <p:nvSpPr>
@@ -3362,7 +3450,7 @@
         </p:nvSpPr>
         <p:spPr>
           <a:xfrm>
-            <a:off x="10012680" y="-228600"/>
+            <a:off x="9083040" y="0"/>
             <a:ext cx="3108960" cy="3108960"/>
           </a:xfrm>
           <a:prstGeom prst="arc">
@@ -3382,6 +3470,10 @@
             <a:prstDash val="solid"/>
           </a:ln>
         </p:spPr>
+        <p:txBody>
+          <a:bodyPr/>
+          <a:p/>
+        </p:txBody>
       </p:sp>
       <p:sp>
         <p:nvSpPr>
@@ -3409,6 +3501,10 @@
             <a:prstDash val="solid"/>
           </a:ln>
         </p:spPr>
+        <p:txBody>
+          <a:bodyPr/>
+          <a:p/>
+        </p:txBody>
       </p:sp>
       <p:sp>
         <p:nvSpPr>
@@ -3512,6 +3608,10 @@
             <a:prstDash val="solid"/>
           </a:ln>
         </p:spPr>
+        <p:txBody>
+          <a:bodyPr/>
+          <a:p/>
+        </p:txBody>
       </p:sp>
       <p:sp>
         <p:nvSpPr>
@@ -3667,6 +3767,10 @@
             </a:outerShdw>
           </a:effectLst>
         </p:spPr>
+        <p:txBody>
+          <a:bodyPr/>
+          <a:p/>
+        </p:txBody>
       </p:sp>
       <p:sp>
         <p:nvSpPr>
@@ -3694,6 +3798,10 @@
             <a:prstDash val="solid"/>
           </a:ln>
         </p:spPr>
+        <p:txBody>
+          <a:bodyPr/>
+          <a:p/>
+        </p:txBody>
       </p:sp>
       <p:sp>
         <p:nvSpPr>
@@ -3721,6 +3829,10 @@
             <a:prstDash val="solid"/>
           </a:ln>
         </p:spPr>
+        <p:txBody>
+          <a:bodyPr/>
+          <a:p/>
+        </p:txBody>
       </p:sp>
       <p:sp>
         <p:nvSpPr>
@@ -3878,6 +3990,10 @@
             </a:outerShdw>
           </a:effectLst>
         </p:spPr>
+        <p:txBody>
+          <a:bodyPr/>
+          <a:p/>
+        </p:txBody>
       </p:sp>
       <p:sp>
         <p:nvSpPr>
@@ -3905,6 +4021,10 @@
             <a:prstDash val="solid"/>
           </a:ln>
         </p:spPr>
+        <p:txBody>
+          <a:bodyPr/>
+          <a:p/>
+        </p:txBody>
       </p:sp>
       <p:sp>
         <p:nvSpPr>
@@ -3932,6 +4052,10 @@
             <a:prstDash val="solid"/>
           </a:ln>
         </p:spPr>
+        <p:txBody>
+          <a:bodyPr/>
+          <a:p/>
+        </p:txBody>
       </p:sp>
       <p:sp>
         <p:nvSpPr>
@@ -4089,6 +4213,10 @@
             </a:outerShdw>
           </a:effectLst>
         </p:spPr>
+        <p:txBody>
+          <a:bodyPr/>
+          <a:p/>
+        </p:txBody>
       </p:sp>
       <p:sp>
         <p:nvSpPr>
@@ -4116,6 +4244,10 @@
             <a:prstDash val="solid"/>
           </a:ln>
         </p:spPr>
+        <p:txBody>
+          <a:bodyPr/>
+          <a:p/>
+        </p:txBody>
       </p:sp>
       <p:sp>
         <p:nvSpPr>
@@ -4143,6 +4275,10 @@
             <a:prstDash val="solid"/>
           </a:ln>
         </p:spPr>
+        <p:txBody>
+          <a:bodyPr/>
+          <a:p/>
+        </p:txBody>
       </p:sp>
       <p:sp>
         <p:nvSpPr>
@@ -4291,6 +4427,10 @@
             <a:prstDash val="solid"/>
           </a:ln>
         </p:spPr>
+        <p:txBody>
+          <a:bodyPr/>
+          <a:p/>
+        </p:txBody>
       </p:sp>
       <p:sp>
         <p:nvSpPr>
@@ -4318,6 +4458,10 @@
             <a:prstDash val="solid"/>
           </a:ln>
         </p:spPr>
+        <p:txBody>
+          <a:bodyPr/>
+          <a:p/>
+        </p:txBody>
       </p:sp>
       <p:sp>
         <p:nvSpPr>
@@ -4466,6 +4610,10 @@
             <a:prstDash val="solid"/>
           </a:ln>
         </p:spPr>
+        <p:txBody>
+          <a:bodyPr/>
+          <a:p/>
+        </p:txBody>
       </p:sp>
       <p:sp>
         <p:nvSpPr>
@@ -4493,6 +4641,10 @@
             <a:prstDash val="solid"/>
           </a:ln>
         </p:spPr>
+        <p:txBody>
+          <a:bodyPr/>
+          <a:p/>
+        </p:txBody>
       </p:sp>
       <p:sp>
         <p:nvSpPr>
@@ -4641,6 +4793,10 @@
             <a:prstDash val="solid"/>
           </a:ln>
         </p:spPr>
+        <p:txBody>
+          <a:bodyPr/>
+          <a:p/>
+        </p:txBody>
       </p:sp>
       <p:sp>
         <p:nvSpPr>
@@ -4668,6 +4824,10 @@
             <a:prstDash val="solid"/>
           </a:ln>
         </p:spPr>
+        <p:txBody>
+          <a:bodyPr/>
+          <a:p/>
+        </p:txBody>
       </p:sp>
       <p:sp>
         <p:nvSpPr>
@@ -4816,6 +4976,10 @@
             <a:prstDash val="solid"/>
           </a:ln>
         </p:spPr>
+        <p:txBody>
+          <a:bodyPr/>
+          <a:p/>
+        </p:txBody>
       </p:sp>
       <p:sp>
         <p:nvSpPr>
@@ -4843,6 +5007,10 @@
             <a:prstDash val="solid"/>
           </a:ln>
         </p:spPr>
+        <p:txBody>
+          <a:bodyPr/>
+          <a:p/>
+        </p:txBody>
       </p:sp>
       <p:sp>
         <p:nvSpPr>
@@ -4991,6 +5159,10 @@
             <a:prstDash val="solid"/>
           </a:ln>
         </p:spPr>
+        <p:txBody>
+          <a:bodyPr/>
+          <a:p/>
+        </p:txBody>
       </p:sp>
       <p:sp>
         <p:nvSpPr>
@@ -5018,6 +5190,10 @@
             <a:prstDash val="solid"/>
           </a:ln>
         </p:spPr>
+        <p:txBody>
+          <a:bodyPr/>
+          <a:p/>
+        </p:txBody>
       </p:sp>
       <p:sp>
         <p:nvSpPr>
@@ -5239,6 +5415,10 @@
             <a:prstDash val="solid"/>
           </a:ln>
         </p:spPr>
+        <p:txBody>
+          <a:bodyPr/>
+          <a:p/>
+        </p:txBody>
       </p:sp>
       <p:sp>
         <p:nvSpPr>
@@ -5266,6 +5446,10 @@
             <a:prstDash val="solid"/>
           </a:ln>
         </p:spPr>
+        <p:txBody>
+          <a:bodyPr/>
+          <a:p/>
+        </p:txBody>
       </p:sp>
       <p:sp>
         <p:nvSpPr>
@@ -5275,7 +5459,7 @@
         </p:nvSpPr>
         <p:spPr>
           <a:xfrm>
-            <a:off x="10012680" y="-228600"/>
+            <a:off x="9083040" y="0"/>
             <a:ext cx="3108960" cy="3108960"/>
           </a:xfrm>
           <a:prstGeom prst="arc">
@@ -5295,6 +5479,10 @@
             <a:prstDash val="solid"/>
           </a:ln>
         </p:spPr>
+        <p:txBody>
+          <a:bodyPr/>
+          <a:p/>
+        </p:txBody>
       </p:sp>
       <p:sp>
         <p:nvSpPr>
@@ -5322,6 +5510,10 @@
             <a:prstDash val="solid"/>
           </a:ln>
         </p:spPr>
+        <p:txBody>
+          <a:bodyPr/>
+          <a:p/>
+        </p:txBody>
       </p:sp>
       <p:sp>
         <p:nvSpPr>
@@ -5425,6 +5617,10 @@
             <a:prstDash val="solid"/>
           </a:ln>
         </p:spPr>
+        <p:txBody>
+          <a:bodyPr/>
+          <a:p/>
+        </p:txBody>
       </p:sp>
       <p:sp>
         <p:nvSpPr>
@@ -5580,6 +5776,10 @@
             </a:outerShdw>
           </a:effectLst>
         </p:spPr>
+        <p:txBody>
+          <a:bodyPr/>
+          <a:p/>
+        </p:txBody>
       </p:sp>
       <p:sp>
         <p:nvSpPr>
@@ -5607,6 +5807,10 @@
             <a:prstDash val="solid"/>
           </a:ln>
         </p:spPr>
+        <p:txBody>
+          <a:bodyPr/>
+          <a:p/>
+        </p:txBody>
       </p:sp>
       <p:sp>
         <p:nvSpPr>
@@ -5634,6 +5838,10 @@
             <a:prstDash val="solid"/>
           </a:ln>
         </p:spPr>
+        <p:txBody>
+          <a:bodyPr/>
+          <a:p/>
+        </p:txBody>
       </p:sp>
       <p:sp>
         <p:nvSpPr>
@@ -5791,6 +5999,10 @@
             </a:outerShdw>
           </a:effectLst>
         </p:spPr>
+        <p:txBody>
+          <a:bodyPr/>
+          <a:p/>
+        </p:txBody>
       </p:sp>
       <p:sp>
         <p:nvSpPr>
@@ -5818,6 +6030,10 @@
             <a:prstDash val="solid"/>
           </a:ln>
         </p:spPr>
+        <p:txBody>
+          <a:bodyPr/>
+          <a:p/>
+        </p:txBody>
       </p:sp>
       <p:sp>
         <p:nvSpPr>
@@ -5845,6 +6061,10 @@
             <a:prstDash val="solid"/>
           </a:ln>
         </p:spPr>
+        <p:txBody>
+          <a:bodyPr/>
+          <a:p/>
+        </p:txBody>
       </p:sp>
       <p:sp>
         <p:nvSpPr>
@@ -6002,6 +6222,10 @@
             </a:outerShdw>
           </a:effectLst>
         </p:spPr>
+        <p:txBody>
+          <a:bodyPr/>
+          <a:p/>
+        </p:txBody>
       </p:sp>
       <p:sp>
         <p:nvSpPr>
@@ -6029,6 +6253,10 @@
             <a:prstDash val="solid"/>
           </a:ln>
         </p:spPr>
+        <p:txBody>
+          <a:bodyPr/>
+          <a:p/>
+        </p:txBody>
       </p:sp>
       <p:sp>
         <p:nvSpPr>
@@ -6056,6 +6284,10 @@
             <a:prstDash val="solid"/>
           </a:ln>
         </p:spPr>
+        <p:txBody>
+          <a:bodyPr/>
+          <a:p/>
+        </p:txBody>
       </p:sp>
       <p:sp>
         <p:nvSpPr>
@@ -6213,6 +6445,10 @@
             </a:outerShdw>
           </a:effectLst>
         </p:spPr>
+        <p:txBody>
+          <a:bodyPr/>
+          <a:p/>
+        </p:txBody>
       </p:sp>
       <p:sp>
         <p:nvSpPr>
@@ -6240,6 +6476,10 @@
             <a:prstDash val="solid"/>
           </a:ln>
         </p:spPr>
+        <p:txBody>
+          <a:bodyPr/>
+          <a:p/>
+        </p:txBody>
       </p:sp>
       <p:sp>
         <p:nvSpPr>
@@ -6267,6 +6507,10 @@
             <a:prstDash val="solid"/>
           </a:ln>
         </p:spPr>
+        <p:txBody>
+          <a:bodyPr/>
+          <a:p/>
+        </p:txBody>
       </p:sp>
       <p:sp>
         <p:nvSpPr>
@@ -6417,6 +6661,10 @@
             <a:prstDash val="solid"/>
           </a:ln>
         </p:spPr>
+        <p:txBody>
+          <a:bodyPr/>
+          <a:p/>
+        </p:txBody>
       </p:sp>
       <p:sp>
         <p:nvSpPr>
@@ -6517,6 +6765,10 @@
             <a:prstDash val="solid"/>
           </a:ln>
         </p:spPr>
+        <p:txBody>
+          <a:bodyPr/>
+          <a:p/>
+        </p:txBody>
       </p:sp>
       <p:sp>
         <p:nvSpPr>
@@ -6544,6 +6796,10 @@
             <a:prstDash val="solid"/>
           </a:ln>
         </p:spPr>
+        <p:txBody>
+          <a:bodyPr/>
+          <a:p/>
+        </p:txBody>
       </p:sp>
       <p:sp>
         <p:nvSpPr>
@@ -6553,7 +6809,7 @@
         </p:nvSpPr>
         <p:spPr>
           <a:xfrm>
-            <a:off x="10012680" y="-228600"/>
+            <a:off x="9083040" y="0"/>
             <a:ext cx="3108960" cy="3108960"/>
           </a:xfrm>
           <a:prstGeom prst="arc">
@@ -6573,6 +6829,10 @@
             <a:prstDash val="solid"/>
           </a:ln>
         </p:spPr>
+        <p:txBody>
+          <a:bodyPr/>
+          <a:p/>
+        </p:txBody>
       </p:sp>
       <p:sp>
         <p:nvSpPr>
@@ -6600,6 +6860,10 @@
             <a:prstDash val="solid"/>
           </a:ln>
         </p:spPr>
+        <p:txBody>
+          <a:bodyPr/>
+          <a:p/>
+        </p:txBody>
       </p:sp>
       <p:sp>
         <p:nvSpPr>
@@ -6703,6 +6967,10 @@
             <a:prstDash val="solid"/>
           </a:ln>
         </p:spPr>
+        <p:txBody>
+          <a:bodyPr/>
+          <a:p/>
+        </p:txBody>
       </p:sp>
       <p:sp>
         <p:nvSpPr>
@@ -6849,6 +7117,10 @@
             <a:prstDash val="solid"/>
           </a:ln>
         </p:spPr>
+        <p:txBody>
+          <a:bodyPr/>
+          <a:p/>
+        </p:txBody>
       </p:sp>
       <p:sp>
         <p:nvSpPr>
@@ -6917,6 +7189,10 @@
             <a:prstDash val="solid"/>
           </a:ln>
         </p:spPr>
+        <p:txBody>
+          <a:bodyPr/>
+          <a:p/>
+        </p:txBody>
       </p:sp>
       <p:sp>
         <p:nvSpPr>
@@ -6987,6 +7263,10 @@
             <a:prstDash val="solid"/>
           </a:ln>
         </p:spPr>
+        <p:txBody>
+          <a:bodyPr/>
+          <a:p/>
+        </p:txBody>
       </p:sp>
       <p:sp>
         <p:nvSpPr>
@@ -7057,6 +7337,10 @@
             <a:prstDash val="solid"/>
           </a:ln>
         </p:spPr>
+        <p:txBody>
+          <a:bodyPr/>
+          <a:p/>
+        </p:txBody>
       </p:sp>
       <p:sp>
         <p:nvSpPr>
@@ -7127,6 +7411,10 @@
             <a:prstDash val="solid"/>
           </a:ln>
         </p:spPr>
+        <p:txBody>
+          <a:bodyPr/>
+          <a:p/>
+        </p:txBody>
       </p:sp>
       <p:sp>
         <p:nvSpPr>
@@ -7195,6 +7483,10 @@
             <a:prstDash val="solid"/>
           </a:ln>
         </p:spPr>
+        <p:txBody>
+          <a:bodyPr/>
+          <a:p/>
+        </p:txBody>
       </p:sp>
       <p:sp>
         <p:nvSpPr>
@@ -7261,6 +7553,10 @@
             <a:prstDash val="solid"/>
           </a:ln>
         </p:spPr>
+        <p:txBody>
+          <a:bodyPr/>
+          <a:p/>
+        </p:txBody>
       </p:sp>
       <p:sp>
         <p:nvSpPr>
@@ -7327,6 +7623,10 @@
             <a:prstDash val="solid"/>
           </a:ln>
         </p:spPr>
+        <p:txBody>
+          <a:bodyPr/>
+          <a:p/>
+        </p:txBody>
       </p:sp>
       <p:sp>
         <p:nvSpPr>
@@ -7393,6 +7693,10 @@
             <a:prstDash val="solid"/>
           </a:ln>
         </p:spPr>
+        <p:txBody>
+          <a:bodyPr/>
+          <a:p/>
+        </p:txBody>
       </p:sp>
       <p:sp>
         <p:nvSpPr>
@@ -7459,6 +7763,10 @@
             <a:prstDash val="solid"/>
           </a:ln>
         </p:spPr>
+        <p:txBody>
+          <a:bodyPr/>
+          <a:p/>
+        </p:txBody>
       </p:sp>
       <p:sp>
         <p:nvSpPr>
@@ -7525,6 +7833,10 @@
             <a:prstDash val="solid"/>
           </a:ln>
         </p:spPr>
+        <p:txBody>
+          <a:bodyPr/>
+          <a:p/>
+        </p:txBody>
       </p:sp>
       <p:sp>
         <p:nvSpPr>
@@ -7591,6 +7903,10 @@
             <a:prstDash val="solid"/>
           </a:ln>
         </p:spPr>
+        <p:txBody>
+          <a:bodyPr/>
+          <a:p/>
+        </p:txBody>
       </p:sp>
       <p:sp>
         <p:nvSpPr>
@@ -7657,6 +7973,10 @@
             <a:prstDash val="solid"/>
           </a:ln>
         </p:spPr>
+        <p:txBody>
+          <a:bodyPr/>
+          <a:p/>
+        </p:txBody>
       </p:sp>
       <p:sp>
         <p:nvSpPr>
@@ -7764,6 +8084,10 @@
             <a:prstDash val="solid"/>
           </a:ln>
         </p:spPr>
+        <p:txBody>
+          <a:bodyPr/>
+          <a:p/>
+        </p:txBody>
       </p:sp>
       <p:sp>
         <p:nvSpPr>
@@ -7841,6 +8165,10 @@
             </a:outerShdw>
           </a:effectLst>
         </p:spPr>
+        <p:txBody>
+          <a:bodyPr/>
+          <a:p/>
+        </p:txBody>
       </p:sp>
       <p:sp>
         <p:nvSpPr>
@@ -7868,6 +8196,10 @@
             <a:prstDash val="solid"/>
           </a:ln>
         </p:spPr>
+        <p:txBody>
+          <a:bodyPr/>
+          <a:p/>
+        </p:txBody>
       </p:sp>
       <p:sp>
         <p:nvSpPr>
@@ -7975,6 +8307,10 @@
             </a:outerShdw>
           </a:effectLst>
         </p:spPr>
+        <p:txBody>
+          <a:bodyPr/>
+          <a:p/>
+        </p:txBody>
       </p:sp>
       <p:sp>
         <p:nvSpPr>
@@ -8002,6 +8338,10 @@
             <a:prstDash val="solid"/>
           </a:ln>
         </p:spPr>
+        <p:txBody>
+          <a:bodyPr/>
+          <a:p/>
+        </p:txBody>
       </p:sp>
       <p:sp>
         <p:nvSpPr>
@@ -8109,6 +8449,10 @@
             </a:outerShdw>
           </a:effectLst>
         </p:spPr>
+        <p:txBody>
+          <a:bodyPr/>
+          <a:p/>
+        </p:txBody>
       </p:sp>
       <p:sp>
         <p:nvSpPr>
@@ -8136,6 +8480,10 @@
             <a:prstDash val="solid"/>
           </a:ln>
         </p:spPr>
+        <p:txBody>
+          <a:bodyPr/>
+          <a:p/>
+        </p:txBody>
       </p:sp>
       <p:sp>
         <p:nvSpPr>
@@ -8243,6 +8591,10 @@
             </a:outerShdw>
           </a:effectLst>
         </p:spPr>
+        <p:txBody>
+          <a:bodyPr/>
+          <a:p/>
+        </p:txBody>
       </p:sp>
       <p:sp>
         <p:nvSpPr>
@@ -8270,6 +8622,10 @@
             <a:prstDash val="solid"/>
           </a:ln>
         </p:spPr>
+        <p:txBody>
+          <a:bodyPr/>
+          <a:p/>
+        </p:txBody>
       </p:sp>
       <p:sp>
         <p:nvSpPr>
@@ -8400,6 +8756,10 @@
             <a:prstDash val="solid"/>
           </a:ln>
         </p:spPr>
+        <p:txBody>
+          <a:bodyPr/>
+          <a:p/>
+        </p:txBody>
       </p:sp>
       <p:sp>
         <p:nvSpPr>
@@ -8427,6 +8787,10 @@
             <a:prstDash val="solid"/>
           </a:ln>
         </p:spPr>
+        <p:txBody>
+          <a:bodyPr/>
+          <a:p/>
+        </p:txBody>
       </p:sp>
       <p:sp>
         <p:nvSpPr>
@@ -8436,7 +8800,7 @@
         </p:nvSpPr>
         <p:spPr>
           <a:xfrm>
-            <a:off x="10012680" y="-228600"/>
+            <a:off x="9083040" y="0"/>
             <a:ext cx="3108960" cy="3108960"/>
           </a:xfrm>
           <a:prstGeom prst="arc">
@@ -8456,6 +8820,10 @@
             <a:prstDash val="solid"/>
           </a:ln>
         </p:spPr>
+        <p:txBody>
+          <a:bodyPr/>
+          <a:p/>
+        </p:txBody>
       </p:sp>
       <p:sp>
         <p:nvSpPr>
@@ -8483,6 +8851,10 @@
             <a:prstDash val="solid"/>
           </a:ln>
         </p:spPr>
+        <p:txBody>
+          <a:bodyPr/>
+          <a:p/>
+        </p:txBody>
       </p:sp>
       <p:sp>
         <p:nvSpPr>
@@ -8586,6 +8958,10 @@
             <a:prstDash val="solid"/>
           </a:ln>
         </p:spPr>
+        <p:txBody>
+          <a:bodyPr/>
+          <a:p/>
+        </p:txBody>
       </p:sp>
       <p:sp>
         <p:nvSpPr>
@@ -8728,6 +9104,10 @@
             <a:prstDash val="solid"/>
           </a:ln>
         </p:spPr>
+        <p:txBody>
+          <a:bodyPr/>
+          <a:p/>
+        </p:txBody>
       </p:sp>
       <p:sp>
         <p:nvSpPr>
@@ -8755,6 +9135,10 @@
             <a:prstDash val="solid"/>
           </a:ln>
         </p:spPr>
+        <p:txBody>
+          <a:bodyPr/>
+          <a:p/>
+        </p:txBody>
       </p:sp>
       <p:sp>
         <p:nvSpPr>
@@ -8828,6 +9212,10 @@
             </a:outerShdw>
           </a:effectLst>
         </p:spPr>
+        <p:txBody>
+          <a:bodyPr/>
+          <a:p/>
+        </p:txBody>
       </p:sp>
       <p:sp>
         <p:nvSpPr>
@@ -8976,6 +9364,10 @@
             <a:prstDash val="solid"/>
           </a:ln>
         </p:spPr>
+        <p:txBody>
+          <a:bodyPr/>
+          <a:p/>
+        </p:txBody>
       </p:sp>
       <p:sp>
         <p:nvSpPr>
@@ -9049,6 +9441,10 @@
             </a:outerShdw>
           </a:effectLst>
         </p:spPr>
+        <p:txBody>
+          <a:bodyPr/>
+          <a:p/>
+        </p:txBody>
       </p:sp>
       <p:sp>
         <p:nvSpPr>
@@ -9197,6 +9593,10 @@
             <a:prstDash val="solid"/>
           </a:ln>
         </p:spPr>
+        <p:txBody>
+          <a:bodyPr/>
+          <a:p/>
+        </p:txBody>
       </p:sp>
       <p:sp>
         <p:nvSpPr>
@@ -9270,6 +9670,10 @@
             </a:outerShdw>
           </a:effectLst>
         </p:spPr>
+        <p:txBody>
+          <a:bodyPr/>
+          <a:p/>
+        </p:txBody>
       </p:sp>
       <p:sp>
         <p:nvSpPr>
@@ -9418,6 +9822,10 @@
             <a:prstDash val="solid"/>
           </a:ln>
         </p:spPr>
+        <p:txBody>
+          <a:bodyPr/>
+          <a:p/>
+        </p:txBody>
       </p:sp>
       <p:sp>
         <p:nvSpPr>
@@ -9491,6 +9899,10 @@
             </a:outerShdw>
           </a:effectLst>
         </p:spPr>
+        <p:txBody>
+          <a:bodyPr/>
+          <a:p/>
+        </p:txBody>
       </p:sp>
       <p:sp>
         <p:nvSpPr>
@@ -9639,6 +10051,10 @@
             <a:prstDash val="solid"/>
           </a:ln>
         </p:spPr>
+        <p:txBody>
+          <a:bodyPr/>
+          <a:p/>
+        </p:txBody>
       </p:sp>
       <p:sp>
         <p:nvSpPr>
@@ -9739,6 +10155,10 @@
             <a:prstDash val="solid"/>
           </a:ln>
         </p:spPr>
+        <p:txBody>
+          <a:bodyPr/>
+          <a:p/>
+        </p:txBody>
       </p:sp>
       <p:sp>
         <p:nvSpPr>
@@ -9766,6 +10186,10 @@
             <a:prstDash val="solid"/>
           </a:ln>
         </p:spPr>
+        <p:txBody>
+          <a:bodyPr/>
+          <a:p/>
+        </p:txBody>
       </p:sp>
       <p:sp>
         <p:nvSpPr>
@@ -9775,7 +10199,7 @@
         </p:nvSpPr>
         <p:spPr>
           <a:xfrm>
-            <a:off x="10012680" y="-228600"/>
+            <a:off x="9083040" y="0"/>
             <a:ext cx="3108960" cy="3108960"/>
           </a:xfrm>
           <a:prstGeom prst="arc">
@@ -9795,6 +10219,10 @@
             <a:prstDash val="solid"/>
           </a:ln>
         </p:spPr>
+        <p:txBody>
+          <a:bodyPr/>
+          <a:p/>
+        </p:txBody>
       </p:sp>
       <p:sp>
         <p:nvSpPr>
@@ -9822,6 +10250,10 @@
             <a:prstDash val="solid"/>
           </a:ln>
         </p:spPr>
+        <p:txBody>
+          <a:bodyPr/>
+          <a:p/>
+        </p:txBody>
       </p:sp>
       <p:sp>
         <p:nvSpPr>
@@ -9925,6 +10357,10 @@
             <a:prstDash val="solid"/>
           </a:ln>
         </p:spPr>
+        <p:txBody>
+          <a:bodyPr/>
+          <a:p/>
+        </p:txBody>
       </p:sp>
       <p:sp>
         <p:nvSpPr>
@@ -10078,6 +10514,10 @@
             </a:outerShdw>
           </a:effectLst>
         </p:spPr>
+        <p:txBody>
+          <a:bodyPr/>
+          <a:p/>
+        </p:txBody>
       </p:sp>
       <p:sp>
         <p:nvSpPr>
@@ -10233,6 +10673,10 @@
             </a:outerShdw>
           </a:effectLst>
         </p:spPr>
+        <p:txBody>
+          <a:bodyPr/>
+          <a:p/>
+        </p:txBody>
       </p:sp>
       <p:sp>
         <p:nvSpPr>
@@ -10388,6 +10832,10 @@
             </a:outerShdw>
           </a:effectLst>
         </p:spPr>
+        <p:txBody>
+          <a:bodyPr/>
+          <a:p/>
+        </p:txBody>
       </p:sp>
       <p:sp>
         <p:nvSpPr>
@@ -10543,6 +10991,10 @@
             </a:outerShdw>
           </a:effectLst>
         </p:spPr>
+        <p:txBody>
+          <a:bodyPr/>
+          <a:p/>
+        </p:txBody>
       </p:sp>
       <p:sp>
         <p:nvSpPr>
@@ -10691,6 +11143,10 @@
             <a:prstDash val="solid"/>
           </a:ln>
         </p:spPr>
+        <p:txBody>
+          <a:bodyPr/>
+          <a:p/>
+        </p:txBody>
       </p:sp>
       <p:sp>
         <p:nvSpPr>
@@ -10800,6 +11256,10 @@
             <a:prstDash val="solid"/>
           </a:ln>
         </p:spPr>
+        <p:txBody>
+          <a:bodyPr/>
+          <a:p/>
+        </p:txBody>
       </p:sp>
       <p:sp>
         <p:nvSpPr>
@@ -10829,6 +11289,10 @@
             <a:prstDash val="solid"/>
           </a:ln>
         </p:spPr>
+        <p:txBody>
+          <a:bodyPr/>
+          <a:p/>
+        </p:txBody>
       </p:sp>
       <p:sp>
         <p:nvSpPr>
@@ -10899,6 +11363,10 @@
             <a:prstDash val="solid"/>
           </a:ln>
         </p:spPr>
+        <p:txBody>
+          <a:bodyPr/>
+          <a:p/>
+        </p:txBody>
       </p:sp>
       <p:sp>
         <p:nvSpPr>
@@ -10928,6 +11396,10 @@
             <a:prstDash val="solid"/>
           </a:ln>
         </p:spPr>
+        <p:txBody>
+          <a:bodyPr/>
+          <a:p/>
+        </p:txBody>
       </p:sp>
       <p:sp>
         <p:nvSpPr>
@@ -10998,6 +11470,10 @@
             <a:prstDash val="solid"/>
           </a:ln>
         </p:spPr>
+        <p:txBody>
+          <a:bodyPr/>
+          <a:p/>
+        </p:txBody>
       </p:sp>
       <p:sp>
         <p:nvSpPr>
@@ -11027,6 +11503,10 @@
             <a:prstDash val="solid"/>
           </a:ln>
         </p:spPr>
+        <p:txBody>
+          <a:bodyPr/>
+          <a:p/>
+        </p:txBody>
       </p:sp>
       <p:sp>
         <p:nvSpPr>
@@ -11097,6 +11577,10 @@
             <a:prstDash val="solid"/>
           </a:ln>
         </p:spPr>
+        <p:txBody>
+          <a:bodyPr/>
+          <a:p/>
+        </p:txBody>
       </p:sp>
       <p:sp>
         <p:nvSpPr>
@@ -11126,6 +11610,10 @@
             <a:prstDash val="solid"/>
           </a:ln>
         </p:spPr>
+        <p:txBody>
+          <a:bodyPr/>
+          <a:p/>
+        </p:txBody>
       </p:sp>
       <p:sp>
         <p:nvSpPr>
@@ -11226,6 +11714,10 @@
             <a:prstDash val="solid"/>
           </a:ln>
         </p:spPr>
+        <p:txBody>
+          <a:bodyPr/>
+          <a:p/>
+        </p:txBody>
       </p:sp>
       <p:sp>
         <p:nvSpPr>
@@ -11253,6 +11745,10 @@
             <a:prstDash val="solid"/>
           </a:ln>
         </p:spPr>
+        <p:txBody>
+          <a:bodyPr/>
+          <a:p/>
+        </p:txBody>
       </p:sp>
       <p:sp>
         <p:nvSpPr>
@@ -11262,7 +11758,7 @@
         </p:nvSpPr>
         <p:spPr>
           <a:xfrm>
-            <a:off x="10012680" y="-228600"/>
+            <a:off x="9083040" y="0"/>
             <a:ext cx="3108960" cy="3108960"/>
           </a:xfrm>
           <a:prstGeom prst="arc">
@@ -11282,6 +11778,10 @@
             <a:prstDash val="solid"/>
           </a:ln>
         </p:spPr>
+        <p:txBody>
+          <a:bodyPr/>
+          <a:p/>
+        </p:txBody>
       </p:sp>
       <p:sp>
         <p:nvSpPr>
@@ -11309,6 +11809,10 @@
             <a:prstDash val="solid"/>
           </a:ln>
         </p:spPr>
+        <p:txBody>
+          <a:bodyPr/>
+          <a:p/>
+        </p:txBody>
       </p:sp>
       <p:sp>
         <p:nvSpPr>
@@ -11412,6 +11916,10 @@
             <a:prstDash val="solid"/>
           </a:ln>
         </p:spPr>
+        <p:txBody>
+          <a:bodyPr/>
+          <a:p/>
+        </p:txBody>
       </p:sp>
       <p:sp>
         <p:nvSpPr>
@@ -11567,6 +12075,10 @@
             </a:outerShdw>
           </a:effectLst>
         </p:spPr>
+        <p:txBody>
+          <a:bodyPr/>
+          <a:p/>
+        </p:txBody>
       </p:sp>
       <p:sp>
         <p:nvSpPr>
@@ -11594,6 +12106,10 @@
             <a:prstDash val="solid"/>
           </a:ln>
         </p:spPr>
+        <p:txBody>
+          <a:bodyPr/>
+          <a:p/>
+        </p:txBody>
       </p:sp>
       <p:sp>
         <p:nvSpPr>
@@ -11621,6 +12137,10 @@
             <a:prstDash val="solid"/>
           </a:ln>
         </p:spPr>
+        <p:txBody>
+          <a:bodyPr/>
+          <a:p/>
+        </p:txBody>
       </p:sp>
       <p:sp>
         <p:nvSpPr>
@@ -11778,6 +12298,10 @@
             </a:outerShdw>
           </a:effectLst>
         </p:spPr>
+        <p:txBody>
+          <a:bodyPr/>
+          <a:p/>
+        </p:txBody>
       </p:sp>
       <p:sp>
         <p:nvSpPr>
@@ -11805,6 +12329,10 @@
             <a:prstDash val="solid"/>
           </a:ln>
         </p:spPr>
+        <p:txBody>
+          <a:bodyPr/>
+          <a:p/>
+        </p:txBody>
       </p:sp>
       <p:sp>
         <p:nvSpPr>
@@ -11832,6 +12360,10 @@
             <a:prstDash val="solid"/>
           </a:ln>
         </p:spPr>
+        <p:txBody>
+          <a:bodyPr/>
+          <a:p/>
+        </p:txBody>
       </p:sp>
       <p:sp>
         <p:nvSpPr>
@@ -11989,6 +12521,10 @@
             </a:outerShdw>
           </a:effectLst>
         </p:spPr>
+        <p:txBody>
+          <a:bodyPr/>
+          <a:p/>
+        </p:txBody>
       </p:sp>
       <p:sp>
         <p:nvSpPr>
@@ -12016,6 +12552,10 @@
             <a:prstDash val="solid"/>
           </a:ln>
         </p:spPr>
+        <p:txBody>
+          <a:bodyPr/>
+          <a:p/>
+        </p:txBody>
       </p:sp>
       <p:sp>
         <p:nvSpPr>
@@ -12043,6 +12583,10 @@
             <a:prstDash val="solid"/>
           </a:ln>
         </p:spPr>
+        <p:txBody>
+          <a:bodyPr/>
+          <a:p/>
+        </p:txBody>
       </p:sp>
       <p:sp>
         <p:nvSpPr>
@@ -12191,6 +12735,10 @@
             <a:prstDash val="solid"/>
           </a:ln>
         </p:spPr>
+        <p:txBody>
+          <a:bodyPr/>
+          <a:p/>
+        </p:txBody>
       </p:sp>
       <p:sp>
         <p:nvSpPr>
@@ -12255,6 +12803,10 @@
             <a:prstDash val="solid"/>
           </a:ln>
         </p:spPr>
+        <p:txBody>
+          <a:bodyPr/>
+          <a:p/>
+        </p:txBody>
       </p:sp>
       <p:sp>
         <p:nvSpPr>
@@ -12321,6 +12873,10 @@
             <a:prstDash val="solid"/>
           </a:ln>
         </p:spPr>
+        <p:txBody>
+          <a:bodyPr/>
+          <a:p/>
+        </p:txBody>
       </p:sp>
       <p:sp>
         <p:nvSpPr>
@@ -12387,6 +12943,10 @@
             <a:prstDash val="solid"/>
           </a:ln>
         </p:spPr>
+        <p:txBody>
+          <a:bodyPr/>
+          <a:p/>
+        </p:txBody>
       </p:sp>
       <p:sp>
         <p:nvSpPr>
@@ -12487,6 +13047,10 @@
             <a:prstDash val="solid"/>
           </a:ln>
         </p:spPr>
+        <p:txBody>
+          <a:bodyPr/>
+          <a:p/>
+        </p:txBody>
       </p:sp>
       <p:sp>
         <p:nvSpPr>
@@ -12514,6 +13078,10 @@
             <a:prstDash val="solid"/>
           </a:ln>
         </p:spPr>
+        <p:txBody>
+          <a:bodyPr/>
+          <a:p/>
+        </p:txBody>
       </p:sp>
       <p:sp>
         <p:nvSpPr>
@@ -12523,7 +13091,7 @@
         </p:nvSpPr>
         <p:spPr>
           <a:xfrm>
-            <a:off x="10012680" y="-228600"/>
+            <a:off x="9083040" y="0"/>
             <a:ext cx="3108960" cy="3108960"/>
           </a:xfrm>
           <a:prstGeom prst="arc">
@@ -12543,6 +13111,10 @@
             <a:prstDash val="solid"/>
           </a:ln>
         </p:spPr>
+        <p:txBody>
+          <a:bodyPr/>
+          <a:p/>
+        </p:txBody>
       </p:sp>
       <p:sp>
         <p:nvSpPr>
@@ -12570,6 +13142,10 @@
             <a:prstDash val="solid"/>
           </a:ln>
         </p:spPr>
+        <p:txBody>
+          <a:bodyPr/>
+          <a:p/>
+        </p:txBody>
       </p:sp>
       <p:sp>
         <p:nvSpPr>
@@ -12673,6 +13249,10 @@
             <a:prstDash val="solid"/>
           </a:ln>
         </p:spPr>
+        <p:txBody>
+          <a:bodyPr/>
+          <a:p/>
+        </p:txBody>
       </p:sp>
       <p:sp>
         <p:nvSpPr>
@@ -12740,15 +13320,13 @@
               <a:buNone/>
             </a:pPr>
             <a:r>
-              <a:rPr lang="en-US" sz="3600" b="1" dirty="0">
+              <a:rPr sz="3400" b="1">
                 <a:solidFill>
                   <a:srgbClr val="12323A"/>
                 </a:solidFill>
-                <a:latin typeface="Georgia" pitchFamily="34" charset="0"/>
-                <a:ea typeface="Georgia" pitchFamily="34" charset="-122"/>
-                <a:cs typeface="Georgia" pitchFamily="34" charset="-120"/>
-              </a:rPr>
-              <a:t>风险与阻塞</a:t>
+                <a:latin typeface="Georgia"/>
+              </a:rPr>
+              <a:t>未完成项 / 风险与阻塞</a:t>
             </a:r>
             <a:endParaRPr lang="en-US" sz="3600" dirty="0"/>
           </a:p>
@@ -12828,6 +13406,10 @@
             </a:outerShdw>
           </a:effectLst>
         </p:spPr>
+        <p:txBody>
+          <a:bodyPr/>
+          <a:p/>
+        </p:txBody>
       </p:sp>
       <p:sp>
         <p:nvSpPr>
@@ -12855,6 +13437,10 @@
             <a:prstDash val="solid"/>
           </a:ln>
         </p:spPr>
+        <p:txBody>
+          <a:bodyPr/>
+          <a:p/>
+        </p:txBody>
       </p:sp>
       <p:sp>
         <p:nvSpPr>
@@ -12882,6 +13468,10 @@
             <a:prstDash val="solid"/>
           </a:ln>
         </p:spPr>
+        <p:txBody>
+          <a:bodyPr/>
+          <a:p/>
+        </p:txBody>
       </p:sp>
       <p:sp>
         <p:nvSpPr>
@@ -13039,6 +13629,10 @@
             </a:outerShdw>
           </a:effectLst>
         </p:spPr>
+        <p:txBody>
+          <a:bodyPr/>
+          <a:p/>
+        </p:txBody>
       </p:sp>
       <p:sp>
         <p:nvSpPr>
@@ -13066,6 +13660,10 @@
             <a:prstDash val="solid"/>
           </a:ln>
         </p:spPr>
+        <p:txBody>
+          <a:bodyPr/>
+          <a:p/>
+        </p:txBody>
       </p:sp>
       <p:sp>
         <p:nvSpPr>
@@ -13093,6 +13691,10 @@
             <a:prstDash val="solid"/>
           </a:ln>
         </p:spPr>
+        <p:txBody>
+          <a:bodyPr/>
+          <a:p/>
+        </p:txBody>
       </p:sp>
       <p:sp>
         <p:nvSpPr>
@@ -13250,6 +13852,10 @@
             </a:outerShdw>
           </a:effectLst>
         </p:spPr>
+        <p:txBody>
+          <a:bodyPr/>
+          <a:p/>
+        </p:txBody>
       </p:sp>
       <p:sp>
         <p:nvSpPr>
@@ -13277,6 +13883,10 @@
             <a:prstDash val="solid"/>
           </a:ln>
         </p:spPr>
+        <p:txBody>
+          <a:bodyPr/>
+          <a:p/>
+        </p:txBody>
       </p:sp>
       <p:sp>
         <p:nvSpPr>
@@ -13304,6 +13914,10 @@
             <a:prstDash val="solid"/>
           </a:ln>
         </p:spPr>
+        <p:txBody>
+          <a:bodyPr/>
+          <a:p/>
+        </p:txBody>
       </p:sp>
       <p:sp>
         <p:nvSpPr>
@@ -13461,6 +14075,10 @@
             </a:outerShdw>
           </a:effectLst>
         </p:spPr>
+        <p:txBody>
+          <a:bodyPr/>
+          <a:p/>
+        </p:txBody>
       </p:sp>
       <p:sp>
         <p:nvSpPr>
@@ -13488,6 +14106,10 @@
             <a:prstDash val="solid"/>
           </a:ln>
         </p:spPr>
+        <p:txBody>
+          <a:bodyPr/>
+          <a:p/>
+        </p:txBody>
       </p:sp>
       <p:sp>
         <p:nvSpPr>
@@ -13515,6 +14137,10 @@
             <a:prstDash val="solid"/>
           </a:ln>
         </p:spPr>
+        <p:txBody>
+          <a:bodyPr/>
+          <a:p/>
+        </p:txBody>
       </p:sp>
       <p:sp>
         <p:nvSpPr>
@@ -13665,6 +14291,10 @@
             <a:prstDash val="solid"/>
           </a:ln>
         </p:spPr>
+        <p:txBody>
+          <a:bodyPr/>
+          <a:p/>
+        </p:txBody>
       </p:sp>
       <p:sp>
         <p:nvSpPr>
@@ -13765,6 +14395,10 @@
             <a:prstDash val="solid"/>
           </a:ln>
         </p:spPr>
+        <p:txBody>
+          <a:bodyPr/>
+          <a:p/>
+        </p:txBody>
       </p:sp>
       <p:sp>
         <p:nvSpPr>
@@ -13792,6 +14426,10 @@
             <a:prstDash val="solid"/>
           </a:ln>
         </p:spPr>
+        <p:txBody>
+          <a:bodyPr/>
+          <a:p/>
+        </p:txBody>
       </p:sp>
       <p:sp>
         <p:nvSpPr>
@@ -13801,7 +14439,7 @@
         </p:nvSpPr>
         <p:spPr>
           <a:xfrm>
-            <a:off x="10012680" y="-228600"/>
+            <a:off x="9083040" y="0"/>
             <a:ext cx="3108960" cy="3108960"/>
           </a:xfrm>
           <a:prstGeom prst="arc">
@@ -13821,6 +14459,10 @@
             <a:prstDash val="solid"/>
           </a:ln>
         </p:spPr>
+        <p:txBody>
+          <a:bodyPr/>
+          <a:p/>
+        </p:txBody>
       </p:sp>
       <p:sp>
         <p:nvSpPr>
@@ -13848,6 +14490,10 @@
             <a:prstDash val="solid"/>
           </a:ln>
         </p:spPr>
+        <p:txBody>
+          <a:bodyPr/>
+          <a:p/>
+        </p:txBody>
       </p:sp>
       <p:sp>
         <p:nvSpPr>
@@ -13951,6 +14597,10 @@
             <a:prstDash val="solid"/>
           </a:ln>
         </p:spPr>
+        <p:txBody>
+          <a:bodyPr/>
+          <a:p/>
+        </p:txBody>
       </p:sp>
       <p:sp>
         <p:nvSpPr>
@@ -14095,6 +14745,10 @@
             <a:prstDash val="solid"/>
           </a:ln>
         </p:spPr>
+        <p:txBody>
+          <a:bodyPr/>
+          <a:p/>
+        </p:txBody>
       </p:sp>
       <p:sp>
         <p:nvSpPr>
@@ -14161,6 +14815,10 @@
             <a:prstDash val="solid"/>
           </a:ln>
         </p:spPr>
+        <p:txBody>
+          <a:bodyPr/>
+          <a:p/>
+        </p:txBody>
       </p:sp>
       <p:sp>
         <p:nvSpPr>
@@ -14268,6 +14926,10 @@
             <a:prstDash val="solid"/>
           </a:ln>
         </p:spPr>
+        <p:txBody>
+          <a:bodyPr/>
+          <a:p/>
+        </p:txBody>
       </p:sp>
       <p:sp>
         <p:nvSpPr>
@@ -14334,6 +14996,10 @@
             <a:prstDash val="solid"/>
           </a:ln>
         </p:spPr>
+        <p:txBody>
+          <a:bodyPr/>
+          <a:p/>
+        </p:txBody>
       </p:sp>
       <p:sp>
         <p:nvSpPr>
@@ -14441,6 +15107,10 @@
             <a:prstDash val="solid"/>
           </a:ln>
         </p:spPr>
+        <p:txBody>
+          <a:bodyPr/>
+          <a:p/>
+        </p:txBody>
       </p:sp>
       <p:sp>
         <p:nvSpPr>
@@ -14507,6 +15177,10 @@
             <a:prstDash val="solid"/>
           </a:ln>
         </p:spPr>
+        <p:txBody>
+          <a:bodyPr/>
+          <a:p/>
+        </p:txBody>
       </p:sp>
       <p:sp>
         <p:nvSpPr>
@@ -14614,6 +15288,10 @@
             <a:prstDash val="solid"/>
           </a:ln>
         </p:spPr>
+        <p:txBody>
+          <a:bodyPr/>
+          <a:p/>
+        </p:txBody>
       </p:sp>
       <p:sp>
         <p:nvSpPr>
@@ -14680,6 +15358,10 @@
             <a:prstDash val="solid"/>
           </a:ln>
         </p:spPr>
+        <p:txBody>
+          <a:bodyPr/>
+          <a:p/>
+        </p:txBody>
       </p:sp>
       <p:sp>
         <p:nvSpPr>
@@ -14787,6 +15469,10 @@
             <a:prstDash val="solid"/>
           </a:ln>
         </p:spPr>
+        <p:txBody>
+          <a:bodyPr/>
+          <a:p/>
+        </p:txBody>
       </p:sp>
       <p:sp>
         <p:nvSpPr>
@@ -14853,6 +15539,10 @@
             <a:prstDash val="solid"/>
           </a:ln>
         </p:spPr>
+        <p:txBody>
+          <a:bodyPr/>
+          <a:p/>
+        </p:txBody>
       </p:sp>
       <p:sp>
         <p:nvSpPr>
@@ -14962,6 +15652,10 @@
             <a:prstDash val="solid"/>
           </a:ln>
         </p:spPr>
+        <p:txBody>
+          <a:bodyPr/>
+          <a:p/>
+        </p:txBody>
       </p:sp>
     </p:spTree>
   </p:cSld>

--- a/docs/reports/project-status-2026-07-11.pptx
+++ b/docs/reports/project-status-2026-07-11.pptx
@@ -13320,7 +13320,7 @@
               <a:buNone/>
             </a:pPr>
             <a:r>
-              <a:rPr sz="3400" b="1">
+              <a:rPr sz="3600" b="1">
                 <a:solidFill>
                   <a:srgbClr val="12323A"/>
                 </a:solidFill>
